--- a/Personal_AI_Tutor_Sneha_Presentation.pptx
+++ b/Personal_AI_Tutor_Sneha_Presentation.pptx
@@ -219,7 +219,7 @@
           <a:p>
             <a:fld id="{E3C24C12-699F-42CD-A3C5-94B762B82AFA}" type="datetimeFigureOut">
               <a:rPr lang="en-US" smtClean="0"/>
-              <a:t>9/22/2026</a:t>
+              <a:t>9/23/2026</a:t>
             </a:fld>
             <a:endParaRPr lang="en-US"/>
           </a:p>
@@ -833,7 +833,7 @@
           <a:p>
             <a:fld id="{5BCAD085-E8A6-8845-BD4E-CB4CCA059FC4}" type="datetimeFigureOut">
               <a:rPr lang="en-US" smtClean="0"/>
-              <a:t>9/22/2026</a:t>
+              <a:t>9/23/2026</a:t>
             </a:fld>
             <a:endParaRPr lang="en-US"/>
           </a:p>
@@ -1001,7 +1001,7 @@
           <a:p>
             <a:fld id="{5BCAD085-E8A6-8845-BD4E-CB4CCA059FC4}" type="datetimeFigureOut">
               <a:rPr lang="en-US" smtClean="0"/>
-              <a:t>9/22/2026</a:t>
+              <a:t>9/23/2026</a:t>
             </a:fld>
             <a:endParaRPr lang="en-US"/>
           </a:p>
@@ -1179,7 +1179,7 @@
           <a:p>
             <a:fld id="{5BCAD085-E8A6-8845-BD4E-CB4CCA059FC4}" type="datetimeFigureOut">
               <a:rPr lang="en-US" smtClean="0"/>
-              <a:t>9/22/2026</a:t>
+              <a:t>9/23/2026</a:t>
             </a:fld>
             <a:endParaRPr lang="en-US"/>
           </a:p>
@@ -1347,7 +1347,7 @@
           <a:p>
             <a:fld id="{5BCAD085-E8A6-8845-BD4E-CB4CCA059FC4}" type="datetimeFigureOut">
               <a:rPr lang="en-US" smtClean="0"/>
-              <a:t>9/22/2026</a:t>
+              <a:t>9/23/2026</a:t>
             </a:fld>
             <a:endParaRPr lang="en-US"/>
           </a:p>
@@ -1592,7 +1592,7 @@
           <a:p>
             <a:fld id="{5BCAD085-E8A6-8845-BD4E-CB4CCA059FC4}" type="datetimeFigureOut">
               <a:rPr lang="en-US" smtClean="0"/>
-              <a:t>9/22/2026</a:t>
+              <a:t>9/23/2026</a:t>
             </a:fld>
             <a:endParaRPr lang="en-US"/>
           </a:p>
@@ -1877,7 +1877,7 @@
           <a:p>
             <a:fld id="{5BCAD085-E8A6-8845-BD4E-CB4CCA059FC4}" type="datetimeFigureOut">
               <a:rPr lang="en-US" smtClean="0"/>
-              <a:t>9/22/2026</a:t>
+              <a:t>9/23/2026</a:t>
             </a:fld>
             <a:endParaRPr lang="en-US"/>
           </a:p>
@@ -2296,7 +2296,7 @@
           <a:p>
             <a:fld id="{5BCAD085-E8A6-8845-BD4E-CB4CCA059FC4}" type="datetimeFigureOut">
               <a:rPr lang="en-US" smtClean="0"/>
-              <a:t>9/22/2026</a:t>
+              <a:t>9/23/2026</a:t>
             </a:fld>
             <a:endParaRPr lang="en-US"/>
           </a:p>
@@ -2413,7 +2413,7 @@
           <a:p>
             <a:fld id="{5BCAD085-E8A6-8845-BD4E-CB4CCA059FC4}" type="datetimeFigureOut">
               <a:rPr lang="en-US" smtClean="0"/>
-              <a:t>9/22/2026</a:t>
+              <a:t>9/23/2026</a:t>
             </a:fld>
             <a:endParaRPr lang="en-US"/>
           </a:p>
@@ -2508,7 +2508,7 @@
           <a:p>
             <a:fld id="{5BCAD085-E8A6-8845-BD4E-CB4CCA059FC4}" type="datetimeFigureOut">
               <a:rPr lang="en-US" smtClean="0"/>
-              <a:t>9/22/2026</a:t>
+              <a:t>9/23/2026</a:t>
             </a:fld>
             <a:endParaRPr lang="en-US"/>
           </a:p>
@@ -2783,7 +2783,7 @@
           <a:p>
             <a:fld id="{5BCAD085-E8A6-8845-BD4E-CB4CCA059FC4}" type="datetimeFigureOut">
               <a:rPr lang="en-US" smtClean="0"/>
-              <a:t>9/22/2026</a:t>
+              <a:t>9/23/2026</a:t>
             </a:fld>
             <a:endParaRPr lang="en-US"/>
           </a:p>
@@ -3035,7 +3035,7 @@
           <a:p>
             <a:fld id="{5BCAD085-E8A6-8845-BD4E-CB4CCA059FC4}" type="datetimeFigureOut">
               <a:rPr lang="en-US" smtClean="0"/>
-              <a:t>9/22/2026</a:t>
+              <a:t>9/23/2026</a:t>
             </a:fld>
             <a:endParaRPr lang="en-US"/>
           </a:p>
@@ -3246,7 +3246,7 @@
           <a:p>
             <a:fld id="{5BCAD085-E8A6-8845-BD4E-CB4CCA059FC4}" type="datetimeFigureOut">
               <a:rPr lang="en-US" smtClean="0"/>
-              <a:t>9/22/2026</a:t>
+              <a:t>9/23/2026</a:t>
             </a:fld>
             <a:endParaRPr lang="en-US"/>
           </a:p>
@@ -10734,7 +10734,7 @@
           <a:lstStyle/>
           <a:p>
             <a:pPr algn="ctr"/>
-            <a:endParaRPr/>
+            <a:endParaRPr dirty="0"/>
           </a:p>
         </p:txBody>
       </p:sp>
